--- a/reports/11-segment-scorecard.pptx
+++ b/reports/11-segment-scorecard.pptx
@@ -107,7 +107,7 @@
   <p:extLst>
     <p:ext uri="{521415D9-36F7-43E2-AB2F-B90AF26B5E84}">
       <p14:sectionLst xmlns:p14="http://schemas.microsoft.com/office/powerpoint/2010/main">
-        <p14:section name="Segment scorecard" id="{21871f3c-e55a-d351-5e5a-7a8d1963054a}">
+        <p14:section name="Segment scorecard" id="{5add078c-dc46-4f3f-442b-e5781f290dd9}">
           <p14:sldIdLst>
             <p14:sldId id="256"/>
           </p14:sldIdLst>
